--- a/media/exports/reports/2026-01/overtime.pptx
+++ b/media/exports/reports/2026-01/overtime.pptx
@@ -220,52 +220,52 @@
                 <c:formatCode>0.0"%";[Red](0.0"%")</c:formatCode>
                 <c:ptCount val="16"/>
                 <c:pt idx="0">
-                  <c:v>1.5</c:v>
+                  <c:v>1.6</c:v>
                 </c:pt>
                 <c:pt idx="1">
-                  <c:v>1.3</c:v>
+                  <c:v>2.7</c:v>
                 </c:pt>
                 <c:pt idx="2">
-                  <c:v>1.9</c:v>
+                  <c:v>2.2</c:v>
                 </c:pt>
                 <c:pt idx="3">
-                  <c:v>2.3</c:v>
+                  <c:v>3.0</c:v>
                 </c:pt>
                 <c:pt idx="4">
-                  <c:v>2.8</c:v>
+                  <c:v>4.6</c:v>
                 </c:pt>
                 <c:pt idx="5">
-                  <c:v>2.4</c:v>
+                  <c:v>4.4</c:v>
                 </c:pt>
                 <c:pt idx="6">
                   <c:v>3.6</c:v>
                 </c:pt>
                 <c:pt idx="7">
-                  <c:v>2.6</c:v>
+                  <c:v>3.7</c:v>
                 </c:pt>
                 <c:pt idx="8">
                   <c:v>2.8</c:v>
                 </c:pt>
                 <c:pt idx="9">
-                  <c:v>2.4</c:v>
+                  <c:v>3.3</c:v>
                 </c:pt>
                 <c:pt idx="10">
-                  <c:v>4.6</c:v>
+                  <c:v>3.3</c:v>
                 </c:pt>
                 <c:pt idx="11">
-                  <c:v>3.0</c:v>
+                  <c:v>3.7</c:v>
                 </c:pt>
                 <c:pt idx="12">
-                  <c:v>4.0</c:v>
+                  <c:v>3.9</c:v>
                 </c:pt>
                 <c:pt idx="13">
-                  <c:v>3.9</c:v>
+                  <c:v>3.8</c:v>
                 </c:pt>
                 <c:pt idx="14">
-                  <c:v>3.5</c:v>
+                  <c:v>7.7</c:v>
                 </c:pt>
                 <c:pt idx="15">
-                  <c:v>3.8</c:v>
+                  <c:v>3.1</c:v>
                 </c:pt>
               </c:numCache>
             </c:numRef>
@@ -314,7 +314,7 @@
         <c:axId val="-2100718248"/>
         <c:scaling>
           <c:orientation val="minMax"/>
-          <c:max val="5.0"/>
+          <c:max val="10.0"/>
           <c:min val="0.0"/>
         </c:scaling>
         <c:delete val="0"/>
@@ -349,7 +349,7 @@
         <c:crossAx val="-2101159928"/>
         <c:crosses val="autoZero"/>
         <c:crossBetween val="midCat"/>
-        <c:majorUnit val="1.0"/>
+        <c:majorUnit val="2.0"/>
       </c:valAx>
     </c:plotArea>
     <c:plotVisOnly val="1"/>
@@ -432,29 +432,18 @@
               </a:solidFill>
             </c:spPr>
           </c:dPt>
-          <c:dPt>
-            <c:idx val="3"/>
-            <c:spPr>
-              <a:solidFill>
-                <a:srgbClr val="0E9F6E"/>
-              </a:solidFill>
-            </c:spPr>
-          </c:dPt>
           <c:cat>
             <c:strRef>
-              <c:f>Sheet1!$A$2:$A$5</c:f>
+              <c:f>Sheet1!$A$2:$A$4</c:f>
               <c:strCache>
-                <c:ptCount val="4"/>
+                <c:ptCount val="3"/>
                 <c:pt idx="0">
-                  <c:v>Paperwork and quotes</c:v>
+                  <c:v>Short-staffed</c:v>
                 </c:pt>
                 <c:pt idx="1">
-                  <c:v>Short-staffed</c:v>
+                  <c:v>Installation ran over</c:v>
                 </c:pt>
                 <c:pt idx="2">
-                  <c:v>Installation ran over</c:v>
-                </c:pt>
-                <c:pt idx="3">
                   <c:v>After-hours call-out</c:v>
                 </c:pt>
               </c:strCache>
@@ -462,21 +451,18 @@
           </c:cat>
           <c:val>
             <c:numRef>
-              <c:f>Sheet1!$B$2:$B$5</c:f>
+              <c:f>Sheet1!$B$2:$B$4</c:f>
               <c:numCache>
                 <c:formatCode>#,##0;[Red](#,##0)</c:formatCode>
-                <c:ptCount val="4"/>
+                <c:ptCount val="3"/>
                 <c:pt idx="0">
-                  <c:v>3.0</c:v>
+                  <c:v>5.5</c:v>
                 </c:pt>
                 <c:pt idx="1">
-                  <c:v>6.0</c:v>
+                  <c:v>8.5</c:v>
                 </c:pt>
                 <c:pt idx="2">
-                  <c:v>7.5</c:v>
-                </c:pt>
-                <c:pt idx="3">
-                  <c:v>23.0</c:v>
+                  <c:v>17.0</c:v>
                 </c:pt>
               </c:numCache>
             </c:numRef>
@@ -540,7 +526,7 @@
       <c:valAx>
         <c:axId val="-2113994440"/>
         <c:scaling>
-          <c:max val="26.45"/>
+          <c:max val="19.549999999999997"/>
           <c:min val="0.0"/>
         </c:scaling>
         <c:delete/>
@@ -668,25 +654,25 @@
               <c:strCache>
                 <c:ptCount val="7"/>
                 <c:pt idx="0">
-                  <c:v>Technician T2</c:v>
+                  <c:v>Technician T6</c:v>
                 </c:pt>
                 <c:pt idx="1">
                   <c:v>Technician T3</c:v>
                 </c:pt>
                 <c:pt idx="2">
-                  <c:v>Technician T6</c:v>
+                  <c:v>Technician T7</c:v>
                 </c:pt>
                 <c:pt idx="3">
-                  <c:v>Technician T7</c:v>
+                  <c:v>Technician T5</c:v>
                 </c:pt>
                 <c:pt idx="4">
-                  <c:v>Technician T5</c:v>
+                  <c:v>Technician T2</c:v>
                 </c:pt>
                 <c:pt idx="5">
-                  <c:v>Technician T4</c:v>
+                  <c:v>Technician T1</c:v>
                 </c:pt>
                 <c:pt idx="6">
-                  <c:v>Technician T1</c:v>
+                  <c:v>Technician T4</c:v>
                 </c:pt>
               </c:strCache>
             </c:strRef>
@@ -698,7 +684,7 @@
                 <c:formatCode>#,##0;[Red](#,##0)</c:formatCode>
                 <c:ptCount val="7"/>
                 <c:pt idx="0">
-                  <c:v>1.5</c:v>
+                  <c:v>0.5</c:v>
                 </c:pt>
                 <c:pt idx="1">
                   <c:v>2.5</c:v>
@@ -707,16 +693,16 @@
                   <c:v>3.5</c:v>
                 </c:pt>
                 <c:pt idx="3">
-                  <c:v>5.5</c:v>
+                  <c:v>3.5</c:v>
                 </c:pt>
                 <c:pt idx="4">
-                  <c:v>7.0</c:v>
+                  <c:v>6.0</c:v>
                 </c:pt>
                 <c:pt idx="5">
-                  <c:v>8.5</c:v>
+                  <c:v>6.5</c:v>
                 </c:pt>
                 <c:pt idx="6">
-                  <c:v>11.0</c:v>
+                  <c:v>8.5</c:v>
                 </c:pt>
               </c:numCache>
             </c:numRef>
@@ -780,7 +766,7 @@
       <c:valAx>
         <c:axId val="-2113994440"/>
         <c:scaling>
-          <c:max val="12.649999999999999"/>
+          <c:max val="9.774999999999999"/>
           <c:min val="0.0"/>
         </c:scaling>
         <c:delete/>
@@ -1277,7 +1263,7 @@
           <a:lstStyle/>
           <a:p>
             <a:r>
-              <a:t>Where is overtime creeping up, and why?. Overtime, January: 3.8%; Overtime hours, January: 39.5 h; January last year: 2.3%. Technicians worked 39.5 h of overtime in January, 3.8% of ordinary hours (target under 5.0%), against 3.5% in December. Over the last year it has gone from 2.3% to 3.8%. After-hours call-out is the main reason: 23.0 h, 58.2% of the overtime. Technician T1 carried the most (11.0 h).</a:t>
+              <a:t>Where is overtime creeping up, and why?. Overtime, January: 3.1%; Overtime hours, January: 31.0 h; January last year: 3.0%. Technicians worked 31.0 h of overtime in January, 3.1% of ordinary hours (target under 5.0%), against 7.7% in December. Over the last year it has gone from 3.0% to 3.1%. After-hours call-out is the main reason: 17.0 h, 54.8% of the overtime. Technician T4 carried the most (8.5 h).</a:t>
             </a:r>
           </a:p>
         </p:txBody>
@@ -4832,7 +4818,7 @@
                 </a:solidFill>
                 <a:latin typeface="Roboto"/>
               </a:rPr>
-              <a:t>Data retrieved 2pm, Tue 6 Oct 2026 · Generated 8 Oct 2026, 6:29pm · Sample data · Made with Python (python-pptx)</a:t>
+              <a:t>Data retrieved 2pm, Tue 6 Oct 2026 · Generated 8 Oct 2026, 11:41pm · Sample data · Made with Python (python-pptx)</a:t>
             </a:r>
           </a:p>
         </p:txBody>
@@ -5178,7 +5164,7 @@
                 </a:solidFill>
                 <a:latin typeface="Roboto"/>
               </a:rPr>
-              <a:t>3.8%</a:t>
+              <a:t>3.1%</a:t>
             </a:r>
           </a:p>
         </p:txBody>
@@ -5344,7 +5330,7 @@
                 </a:solidFill>
                 <a:latin typeface="Roboto"/>
               </a:rPr>
-              <a:t>39.5 h</a:t>
+              <a:t>31.0 h</a:t>
             </a:r>
           </a:p>
         </p:txBody>
@@ -5383,7 +5369,7 @@
                 </a:solidFill>
                 <a:latin typeface="Roboto"/>
               </a:rPr>
-              <a:t>December 38.0 h</a:t>
+              <a:t>December 70.5 h</a:t>
             </a:r>
           </a:p>
         </p:txBody>
@@ -5510,7 +5496,7 @@
                 </a:solidFill>
                 <a:latin typeface="Roboto"/>
               </a:rPr>
-              <a:t>2.3%</a:t>
+              <a:t>3.0%</a:t>
             </a:r>
           </a:p>
         </p:txBody>
@@ -5549,7 +5535,7 @@
                 </a:solidFill>
                 <a:latin typeface="Roboto"/>
               </a:rPr>
-              <a:t>24.5 h of overtime</a:t>
+              <a:t>27.5 h of overtime</a:t>
             </a:r>
           </a:p>
         </p:txBody>
@@ -5694,7 +5680,7 @@
                 </a:solidFill>
                 <a:latin typeface="Roboto"/>
               </a:rPr>
-              <a:t>Technicians worked 39.5 h of overtime in January, 3.8% of ordinary hours (target under 5.0%), against 3.5% in December. Over the last year it has gone from 2.3% to 3.8%.</a:t>
+              <a:t>Technicians worked 31.0 h of overtime in January, 3.1% of ordinary hours (target under 5.0%), against 7.7% in December. Over the last year it has gone from 3.0% to 3.1%.</a:t>
             </a:r>
           </a:p>
         </p:txBody>
@@ -5821,7 +5807,7 @@
                 </a:solidFill>
                 <a:latin typeface="Roboto"/>
               </a:rPr>
-              <a:t>After-hours call-out is the main reason: 23.0 h, 58.2% of the overtime. Technician T1 carried the most (11.0 h).</a:t>
+              <a:t>After-hours call-out is the main reason: 17.0 h, 54.8% of the overtime. Technician T4 carried the most (8.5 h).</a:t>
             </a:r>
           </a:p>
         </p:txBody>
@@ -5899,7 +5885,7 @@
                 </a:solidFill>
                 <a:latin typeface="Roboto"/>
               </a:rPr>
-              <a:t>Data retrieved 2pm, Tue 6 Oct 2026 · Generated 8 Oct 2026, 6:29pm · Sample data · Made with Python (python-pptx)</a:t>
+              <a:t>Data retrieved 2pm, Tue 6 Oct 2026 · Generated 8 Oct 2026, 11:41pm · Sample data · Made with Python (python-pptx)</a:t>
             </a:r>
           </a:p>
         </p:txBody>
@@ -6214,7 +6200,7 @@
                 </a:solidFill>
                 <a:latin typeface="Roboto"/>
               </a:rPr>
-              <a:t>Data retrieved 2pm, Tue 6 Oct 2026 · Generated 8 Oct 2026, 6:29pm · Sample data · Made with Python (python-pptx)</a:t>
+              <a:t>Data retrieved 2pm, Tue 6 Oct 2026 · Generated 8 Oct 2026, 11:41pm · Sample data · Made with Python (python-pptx)</a:t>
             </a:r>
           </a:p>
         </p:txBody>
@@ -6529,7 +6515,7 @@
                 </a:solidFill>
                 <a:latin typeface="Roboto"/>
               </a:rPr>
-              <a:t>Data retrieved 2pm, Tue 6 Oct 2026 · Generated 8 Oct 2026, 6:29pm · Sample data · Made with Python (python-pptx)</a:t>
+              <a:t>Data retrieved 2pm, Tue 6 Oct 2026 · Generated 8 Oct 2026, 11:41pm · Sample data · Made with Python (python-pptx)</a:t>
             </a:r>
           </a:p>
         </p:txBody>

--- a/media/exports/reports/2026-01/overtime.pptx
+++ b/media/exports/reports/2026-01/overtime.pptx
@@ -1193,7 +1193,7 @@
           <a:lstStyle/>
           <a:p>
             <a:r>
-              <a:t>Where is overtime creeping up, and why?. Sample Electrical &amp; Air Pty Ltd. Period: January 2026. Each technician's paid hours, day by day: ordinary hours and overtime, with the main reason for the overtime.</a:t>
+              <a:t>Where is overtime creeping up, and why?. Sample Electrical &amp; Air Pty Ltd. Period: January 2026. In short: Overtime was 3.1% of ordinary hours in January (target under 5.0%), up from 3.0% a year earlier. Each technician's paid hours, day by day: ordinary hours and overtime, with the main reason for the overtime.</a:t>
             </a:r>
           </a:p>
         </p:txBody>
@@ -4653,7 +4653,7 @@
                 </a:solidFill>
                 <a:latin typeface="Roboto"/>
               </a:rPr>
-              <a:t>Period: January 2026. Each technician's paid hours, day by day: ordinary hours and overtime, with the main reason for the overtime.</a:t>
+              <a:t>Period: January 2026. In short: Overtime was 3.1% of ordinary hours in January (target under 5.0%), up from 3.0% a year earlier. Each technician's paid hours, day by day: ordinary hours and overtime, with the main reason for the overtime.</a:t>
             </a:r>
           </a:p>
         </p:txBody>
@@ -4818,7 +4818,7 @@
                 </a:solidFill>
                 <a:latin typeface="Roboto"/>
               </a:rPr>
-              <a:t>Data retrieved 2pm, Tue 6 Oct 2026 · Generated 8 Oct 2026, 11:41pm · Sample data · Made with Python (python-pptx)</a:t>
+              <a:t>Data retrieved 2pm, Tue 6 Oct 2026 · Generated 10 Oct 2026, 9:55pm · Sample data · Made with Python (python-pptx)</a:t>
             </a:r>
           </a:p>
         </p:txBody>
@@ -5885,7 +5885,7 @@
                 </a:solidFill>
                 <a:latin typeface="Roboto"/>
               </a:rPr>
-              <a:t>Data retrieved 2pm, Tue 6 Oct 2026 · Generated 8 Oct 2026, 11:41pm · Sample data · Made with Python (python-pptx)</a:t>
+              <a:t>Data retrieved 2pm, Tue 6 Oct 2026 · Generated 10 Oct 2026, 9:55pm · Sample data · Made with Python (python-pptx)</a:t>
             </a:r>
           </a:p>
         </p:txBody>
@@ -6200,7 +6200,7 @@
                 </a:solidFill>
                 <a:latin typeface="Roboto"/>
               </a:rPr>
-              <a:t>Data retrieved 2pm, Tue 6 Oct 2026 · Generated 8 Oct 2026, 11:41pm · Sample data · Made with Python (python-pptx)</a:t>
+              <a:t>Data retrieved 2pm, Tue 6 Oct 2026 · Generated 10 Oct 2026, 9:55pm · Sample data · Made with Python (python-pptx)</a:t>
             </a:r>
           </a:p>
         </p:txBody>
@@ -6515,7 +6515,7 @@
                 </a:solidFill>
                 <a:latin typeface="Roboto"/>
               </a:rPr>
-              <a:t>Data retrieved 2pm, Tue 6 Oct 2026 · Generated 8 Oct 2026, 11:41pm · Sample data · Made with Python (python-pptx)</a:t>
+              <a:t>Data retrieved 2pm, Tue 6 Oct 2026 · Generated 10 Oct 2026, 9:55pm · Sample data · Made with Python (python-pptx)</a:t>
             </a:r>
           </a:p>
         </p:txBody>
